--- a/docs/교재/실전반_오프라인/08회차/실전반_오프라인_08회차.pptx
+++ b/docs/교재/실전반_오프라인/08회차/실전반_오프라인_08회차.pptx
@@ -1442,7 +1442,7 @@
           <a:lstStyle/>
           <a:p>
             <a:r>
-              <a:t>처리 건의 한 시점을 해석하는 문항입니다. 제출이라는 지점에서 에이전트의 몫과 프로세스의 몫이 어떻게 나뉘었는지를 떠올려 보시기 바랍니다.</a:t>
+              <a:t>누가 승인 작업을 끝낼 수 있는지, 책임의 경계를 묻는 문항입니다. 승인 작업을 끝낼 수 있는 역할이 누구였는지, 그리고 다른 역할의 시도가 어떻게 남았는지를 떠올려 보시기 바랍니다.</a:t>
             </a:r>
           </a:p>
         </p:txBody>
@@ -1582,7 +1582,7 @@
           <a:lstStyle/>
           <a:p>
             <a:r>
-              <a:t>정답보다 판단 기준이 중요합니다. 첫 문항의 2번은 COMPLETED를 성공으로 읽은 것입니다. 둘째 문항의 4번은 응답 없음을 승인으로 읽은 것입니다. 셋째 문항의 3번은 실행 도중에 규칙이 바뀐다고 본 것으로, 열린 처리 건이 따르는 판본은 바뀌지 않습니다.</a:t>
+              <a:t>정답보다 판단 기준이 중요합니다. 첫 문항의 2번은 COMPLETED를 성공으로 읽은 것입니다. 둘째 문항의 2번은 권한 밖의 시도가 거부된 것을 사람의 거절로 읽은 것입니다. 셋째 문항의 3번은 실행 도중에 규칙이 바뀐다고 본 것으로, 열린 처리 건이 따르는 판본은 바뀌지 않습니다.</a:t>
             </a:r>
           </a:p>
         </p:txBody>
@@ -5704,7 +5704,7 @@
       </p:sp>
       <p:pic>
         <p:nvPicPr>
-          <p:cNvPr id="6" name="삽화:흐름_토큰_둘.svg" descr="illust_1416167754545395525_1791735769.png"/>
+          <p:cNvPr id="6" name="삽화:흐름_토큰_둘.svg" descr="illust_3246680689481367966_1791735769.png"/>
           <p:cNvPicPr>
             <a:picLocks noChangeAspect="1"/>
           </p:cNvPicPr>
@@ -19371,7 +19371,7 @@
                 <a:ea typeface="맑은 고딕"/>
                 <a:cs typeface="맑은 고딕"/>
               </a:rPr>
-              <a:t>Quiz 2. 판단이 제출된 시점의 처리 건</a:t>
+              <a:t>Quiz 2. 승인 역할이 아닌 쪽의 승인 시도</a:t>
             </a:r>
           </a:p>
         </p:txBody>
@@ -19410,7 +19410,7 @@
                 <a:ea typeface="맑은 고딕"/>
                 <a:cs typeface="맑은 고딕"/>
               </a:rPr>
-              <a:t>에이전트가 원인을 쿨러 핀 오염으로 가리고 팬 최대 운전을 추천하는 판단을 제출했으며, 운전원은 아직 응답하지 않았다.</a:t>
+              <a:t>긴급 대응 처리 건이 운전원 승인에서 기다리는 동안, 운전원 역할이 아닌 담당자가 추천안을 승인하려고 했다.</a:t>
             </a:r>
           </a:p>
         </p:txBody>
@@ -19548,7 +19548,7 @@
                 <a:ea typeface="맑은 고딕"/>
                 <a:cs typeface="맑은 고딕"/>
               </a:rPr>
-              <a:t>이 시점의 처리 건에 대한 설명으로 옳은 것은?</a:t>
+              <a:t>이 시도 뒤의 처리 건에 대한 설명으로 옳은 것은?</a:t>
             </a:r>
           </a:p>
         </p:txBody>
@@ -19686,7 +19686,7 @@
                 <a:ea typeface="맑은 고딕"/>
                 <a:cs typeface="맑은 고딕"/>
               </a:rPr>
-              <a:t>추천이 제출되었으므로 팬 속도는 이미 100 %로 올라갔다</a:t>
+              <a:t>승인이 접수되어 냉각 명령 작업이 열린다</a:t>
             </a:r>
           </a:p>
         </p:txBody>
@@ -19824,7 +19824,7 @@
                 <a:ea typeface="맑은 고딕"/>
                 <a:cs typeface="맑은 고딕"/>
               </a:rPr>
-              <a:t>에이전트가 승인 결과를 기다리며 다음 도구를 부르고 있다</a:t>
+              <a:t>승인이 거부되면서 처리 건이 거절 종결로 닫힌다</a:t>
             </a:r>
           </a:p>
         </p:txBody>
@@ -19962,7 +19962,7 @@
                 <a:ea typeface="맑은 고딕"/>
                 <a:cs typeface="맑은 고딕"/>
               </a:rPr>
-              <a:t>에이전트의 일은 끝났고 엔진이 운전원 승인을 열어 기다린다</a:t>
+              <a:t>시도는 기록 없이 무시되고 처리 건은 그대로 기다린다</a:t>
             </a:r>
           </a:p>
         </p:txBody>
@@ -20100,7 +20100,7 @@
                 <a:ea typeface="맑은 고딕"/>
                 <a:cs typeface="맑은 고딕"/>
               </a:rPr>
-              <a:t>운전원이 응답하지 않으면 추천대로 자동 실행된다</a:t>
+              <a:t>시도는 거부되어 감사 기록에 남고 운전원 승인은 열린 채로 기다린다</a:t>
             </a:r>
           </a:p>
         </p:txBody>
@@ -21987,7 +21987,7 @@
                 <a:ea typeface="맑은 고딕"/>
                 <a:cs typeface="맑은 고딕"/>
               </a:rPr>
-              <a:t>세 문항은 판단의 근거가 되는 기록, 제출 시점의 몫의 구분, 판본이 적용되는 시점을 바르게 읽는지 확인한다.</a:t>
+              <a:t>세 문항은 판단의 근거가 되는 기록, 승인할 수 있는 역할의 경계, 판본이 적용되는 시점을 바르게 읽는지 확인한다.</a:t>
             </a:r>
           </a:p>
         </p:txBody>
@@ -22460,7 +22460,7 @@
                 <a:ea typeface="맑은 고딕"/>
                 <a:cs typeface="맑은 고딕"/>
               </a:rPr>
-              <a:t>에이전트는 제출까지 한다. 다음 단계를 여는 것은 엔진이고, 설비 명령은 승인 뒤에만 나간다.</a:t>
+              <a:t>승인 작업은 운전원 역할만 끝낼 수 있다. 다른 역할의 시도는 거부되어 기록되고 승인 작업은 그대로 기다린다.</a:t>
             </a:r>
           </a:p>
         </p:txBody>
@@ -22499,7 +22499,7 @@
                 <a:ea typeface="맑은 고딕"/>
                 <a:cs typeface="맑은 고딕"/>
               </a:rPr>
-              <a:t>3번</a:t>
+              <a:t>4번</a:t>
             </a:r>
           </a:p>
         </p:txBody>
@@ -24908,7 +24908,7 @@
       </p:sp>
       <p:pic>
         <p:nvPicPr>
-          <p:cNvPr id="6" name="삽화:흐름_토큰_승인대기.svg" descr="illust_4561142319610981140_1791735769.png"/>
+          <p:cNvPr id="6" name="삽화:흐름_토큰_승인대기.svg" descr="illust_5794777223383446329_1791735769.png"/>
           <p:cNvPicPr>
             <a:picLocks noChangeAspect="1"/>
           </p:cNvPicPr>

--- a/docs/교재/실전반_오프라인/08회차/실전반_오프라인_08회차.pptx
+++ b/docs/교재/실전반_오프라인/08회차/실전반_오프라인_08회차.pptx
@@ -952,7 +952,7 @@
           <a:lstStyle/>
           <a:p>
             <a:r>
-              <a:t>첫 실습에서는 배포한 프로세스를 실제로 실행합니다. 쿨러 열화를 일으켜 처리 건이 열리는 것을 보고, 에이전트의 판단 뒤 운전원 승인에서 기다리는 상태를 확인합니다. 승인한 뒤에는 명령과 유온 재확인을 거쳐 어느 끝 이벤트에 닿았는지를 읽습니다. 승인을 기다리는 상태와 끝난 상태를 처리 건의 기록으로 구분해 보시기 바랍니다.</a:t>
+              <a:t>첫 실습에서는 배포한 프로세스를 실제로 실행합니다. 쿨러 열화를 일으켜 처리 건이 열리는 것을 보고, 에이전트의 판단 뒤 운전원 승인에서 기다리는 상태를 확인합니다. 승인한 뒤에는 명령과 재관측을 거쳐 어느 끝 이벤트에 닿았는지를 읽습니다. 승인을 기다리는 상태와 끝난 상태를 처리 건의 기록으로 구분해 보시기 바랍니다.</a:t>
             </a:r>
           </a:p>
         </p:txBody>
@@ -5704,7 +5704,7 @@
       </p:sp>
       <p:pic>
         <p:nvPicPr>
-          <p:cNvPr id="6" name="삽화:흐름_토큰_둘.svg" descr="illust_3246680689481367966_1791735769.png"/>
+          <p:cNvPr id="6" name="삽화:흐름_토큰_둘.svg" descr="illust_3897538782687642313_1791735769.png"/>
           <p:cNvPicPr>
             <a:picLocks noChangeAspect="1"/>
           </p:cNvPicPr>
@@ -9429,7 +9429,7 @@
                 <a:ea typeface="맑은 고딕"/>
                 <a:cs typeface="맑은 고딕"/>
               </a:rPr>
-              <a:t>cause는 에이전트 단계가, chosen_skill은 운전원 승인이, work_order는 작업지시 등록이 만들었다.</a:t>
+              <a:t>cause는 에이전트 단계가, 승인된 조치 방법 chosen_skill은 운전원 승인이, work_order는 작업지시 등록이 만들었다.</a:t>
             </a:r>
           </a:p>
         </p:txBody>
@@ -12920,7 +12920,7 @@
                 <a:ea typeface="맑은 고딕"/>
                 <a:cs typeface="맑은 고딕"/>
               </a:rPr>
-              <a:t>승인 뒤 명령, 유온 재확인을 거쳐 닿은 끝 이벤트와 결과를 읽는다</a:t>
+              <a:t>승인 뒤 명령, 재관측을 거쳐 닿은 끝 이벤트와 결과를 읽는다</a:t>
             </a:r>
           </a:p>
         </p:txBody>
@@ -24908,7 +24908,7 @@
       </p:sp>
       <p:pic>
         <p:nvPicPr>
-          <p:cNvPr id="6" name="삽화:흐름_토큰_승인대기.svg" descr="illust_5794777223383446329_1791735769.png"/>
+          <p:cNvPr id="6" name="삽화:흐름_토큰_승인대기.svg" descr="illust_4221727986253824292_1791735769.png"/>
           <p:cNvPicPr>
             <a:picLocks noChangeAspect="1"/>
           </p:cNvPicPr>

--- a/docs/교재/실전반_오프라인/08회차/실전반_오프라인_08회차.pptx
+++ b/docs/교재/실전반_오프라인/08회차/실전반_오프라인_08회차.pptx
@@ -532,7 +532,7 @@
           <a:lstStyle/>
           <a:p>
             <a:r>
-              <a:t>7회차에서는 긴급 대응 프로세스를 직접 그려 배포했습니다. 오늘은 그 프로세스가 실행되는 동안 무슨 일이 일어나는지를 다룹니다. 승인 권한과 실행 상태, 판본과 기록을 짚은 뒤, 네 실습에서 직접 실행하고 예외의 경우를 검증하고 설정을 고쳐 다시 배포합니다. 이 네 가지를 자료 없이 자신의 말로 설명할 수 있는지가 오늘의 기준입니다.</a:t>
+              <a:t>7회차에서는 긴급 대응 프로세스를 직접 그려 배포했습니다. 오늘은 그 프로세스가 실행되는 동안 무슨 일이 일어나는지를 다룹니다. 승인 권한과 실행 상태, 판본과 기록을 짚은 뒤, 네 실습에서 직접 실행하고 예외의 경우를 검증하고 설정을 고쳐 다시 배포합니다. 오늘의 목표는 모두 기록을 읽는 일이어서, 수업이 끝났을 때 처리 건 한 건의 기록을 놓고 어디에서 기다렸고 어떻게 닫혔는지를 말할 수 있어야 합니다.</a:t>
             </a:r>
           </a:p>
         </p:txBody>
@@ -882,7 +882,7 @@
           <a:lstStyle/>
           <a:p>
             <a:r>
-              <a:t>프로세스가 실행되는 동안 일어난 일은 기록으로 남습니다. 누가 무엇을 결정했는지를 나중에 확인하려고 남기는 이런 기록을 감사 기록, Audit Log라고 합니다. 처리 건이 열릴 때, 승인이 접수되고 다음 단계로 전달될 때, 결과 보고가 나갈 때마다 한 줄씩 남습니다. 승인할 역할이 아닌 쪽이 승인을 시도해 거부된 일도 DECISION_DENIED로 남습니다.</a:t>
+              <a:t>프로세스가 실행되는 동안 일어난 일은 두 가지 기록으로 남습니다. 처리 기록은 처리 건 한 건 안에서 일어난 일을 차례로 적은 것으로, 승인이 접수되고 다음 단계로 전달될 때와 결과 보고가 나갈 때 한 줄씩 남습니다. 감사 기록, Audit Log는 누가 무엇을 결정했는지를 나중에 확인하려고 처리 건 밖의 일까지 적는 기록입니다. 처리 건이 열린 일과 정의가 배포된 일, 그리고 승인할 역할이 아닌 쪽이 승인을 시도해 거부된 일이 여기에 남습니다. 처리 건 하나를 되짚을 때는 두 기록을 함께 읽습니다.</a:t>
             </a:r>
           </a:p>
         </p:txBody>
@@ -952,7 +952,7 @@
           <a:lstStyle/>
           <a:p>
             <a:r>
-              <a:t>첫 실습에서는 배포한 프로세스를 실제로 실행합니다. 쿨러 열화를 일으켜 처리 건이 열리는 것을 보고, 에이전트의 판단 뒤 운전원 승인에서 기다리는 상태를 확인합니다. 승인한 뒤에는 명령과 재관측을 거쳐 어느 끝 이벤트에 닿았는지를 읽습니다. 승인을 기다리는 상태와 끝난 상태를 처리 건의 기록으로 구분해 보시기 바랍니다.</a:t>
+              <a:t>첫 실습에서는 배포한 프로세스를 실제로 실행합니다. 쿨러 열화를 일으켜 처리 건이 열리는 것을 보고, 에이전트의 추천안이 나온 뒤 운전원 승인에서 기다리는 상태를 확인합니다. 승인한 뒤에는 명령과 재관측을 거쳐 어느 끝 이벤트에 닿았는지를 읽습니다. 승인을 기다리는 상태와 끝난 상태를 처리 건의 기록으로 구분해 보시기 바랍니다.</a:t>
             </a:r>
           </a:p>
         </p:txBody>
@@ -1162,7 +1162,7 @@
           <a:lstStyle/>
           <a:p>
             <a:r>
-              <a:t>마지막 실습에서는 고친 흐름을 다시 검사해 새 판본으로 등록하고 배포합니다. 새 판본으로 열린 처리 건을 한 번은 승인하고 한 번은 거절합니다. 승인하면 명령과 결과 보고가 이어지고 거절하면 명령 없이 닫히는지를 처리 건의 기록에서 확인합니다. 그린 파일과 연결할 때 넣은 값과 처리 결과는 고치기 전의 것과 견줄 근거로 남겨 둡니다.</a:t>
+              <a:t>마지막 실습에서는 고친 흐름을 다시 검사해 새 판본으로 등록하고 배포합니다. 새 판본으로 열린 처리 건을 한 번은 승인하고 한 번은 거절합니다. 승인하면 명령과 결과 보고가 이어지고 거절하면 명령 없이 닫히는지를 처리 건의 기록에서 확인합니다. 그린 파일과 연결할 때 넣은 값과 처리 결과는 고치기 전의 것과 견줄 근거로 남겨 둡니다. 확인을 마치면 기준 흐름을 다시 배포해, 다음 경보가 기준 흐름으로 처리되도록 되돌립니다.</a:t>
             </a:r>
           </a:p>
         </p:txBody>
@@ -1232,7 +1232,7 @@
           <a:lstStyle/>
           <a:p>
             <a:r>
-              <a:t>뜻은 앞에서 풀었으므로 여기서는 이름과 자리만 확인합니다. 이 넷과 함께 완료 조건, 승인 대기, 단계의 상태, 판본과 배포가 오늘의 용어입니다. 하나를 골라 자료를 덮고 자신의 문장으로 써 보시기 바랍니다.</a:t>
+              <a:t>오른쪽 칸은 용어마다 긴급 대응 처리 건에서 찾을 수 있는 자리입니다. 이 넷과 함께 완료 조건, 승인 대기, 단계의 상태, 판본과 배포가 오늘의 용어입니다. 실습에서 연 처리 건의 기록에서 이 용어들에 해당하는 값을 하나씩 찾아보시기 바랍니다.</a:t>
             </a:r>
           </a:p>
         </p:txBody>
@@ -1302,7 +1302,7 @@
           <a:lstStyle/>
           <a:p>
             <a:r>
-              <a:t>비즈니스 프로세스에는 끝났다고 보는 조건, 곧 완료 조건이 있다고 했습니다. 이 조건부터 보겠습니다. 승인되어 유온이 회복된 경우만 정해 두면 나머지 경우에 업무가 닫히지 않은 채 남습니다. 승인했지만 유온이 회복되지 않으면 미달로 보고하고 닫습니다. 거절하면 설비 명령 없이 거절로 보고하고 닫습니다. 운전원이 응답하지 않으면 닫지 않고 기다리며, 10분이 지나면 알림만 보냅니다.</a:t>
+              <a:t>비즈니스 프로세스에는 끝났다고 보는 조건, 곧 완료 조건이 있다고 했습니다. 이 조건부터 보겠습니다. 승인되어 유온이 회복된 경우만 정해 두면 나머지 경우에 업무가 닫히지 않은 채 남습니다. 승인했지만 유온이 회복되지 않으면 미달로 보고하고 닫습니다. 거절하면 설비 명령 없이 거절로 보고하고 닫습니다. 운전원이 응답하지 않으면 닫지 않고 기다리며, 10분이 지나면 알림만 보냅니다. 첫 줄의 작업지시 번호는 긴급 대응 프로세스가 처리한 쿨러 성능 저하 경보 한 건의 기록입니다. 6회차까지 본 경보와 같은 종류의 다른 한 건이어서 식별자와 값이 다르며, 오늘 보는 처리 건의 기록은 모두 이 한 건의 것입니다.</a:t>
             </a:r>
           </a:p>
         </p:txBody>
@@ -1582,7 +1582,7 @@
           <a:lstStyle/>
           <a:p>
             <a:r>
-              <a:t>정답보다 판단 기준이 중요합니다. 첫 문항의 2번은 COMPLETED를 성공으로 읽은 것입니다. 둘째 문항의 2번은 권한 밖의 시도가 거부된 것을 사람의 거절로 읽은 것입니다. 셋째 문항의 3번은 실행 도중에 규칙이 바뀐다고 본 것으로, 열린 처리 건이 따르는 판본은 바뀌지 않습니다.</a:t>
+              <a:t>세 문항 모두 기록의 어느 값을 근거로 삼는지를 묻습니다. 첫 문항의 2번은 COMPLETED를 성공으로 읽은 것입니다. 둘째 문항의 2번은 권한 밖의 시도가 거부된 것을 사람의 거절로 읽은 것입니다. 셋째 문항의 3번은 실행 도중에 규칙이 바뀐다고 본 것으로, 열린 처리 건이 따르는 판본은 바뀌지 않습니다.</a:t>
             </a:r>
           </a:p>
         </p:txBody>
@@ -1652,7 +1652,7 @@
           <a:lstStyle/>
           <a:p>
             <a:r>
-              <a:t>순서와 승인을 에이전트의 판단에 맡기지 않고 프로세스가 어떻게 지키는지 확인합니다. 냉각 명령 작업은 승인 작업이 승인으로 끝나야 열리므로 추천만으로는 명령이 나가지 않습니다. 승인 작업은 운전원 역할만 끝낼 수 있고, 다른 역할의 시도는 거부되어 기록으로 남습니다. 이 모든 진행이 처리 건에 남아 나중에 되짚을 수 있습니다.</a:t>
+              <a:t>순서와 승인을 에이전트의 판단에 맡기지 않고 프로세스가 어떻게 지키는지 확인합니다. 냉각 명령 작업은 승인 작업이 승인으로 끝나야 열리므로 추천안만으로는 명령이 나가지 않습니다. 승인 작업은 운전원 역할만 끝낼 수 있고, 다른 역할의 시도는 거부되어 기록으로 남습니다. 이 모든 진행이 처리 건에 남아 나중에 되짚을 수 있습니다.</a:t>
             </a:r>
           </a:p>
         </p:txBody>
@@ -1792,7 +1792,7 @@
           <a:lstStyle/>
           <a:p>
             <a:r>
-              <a:t>토큰이 작업에 닿으면 엔진은 그 작업의 종류에 따라 다르게 움직입니다. 사용자 작업이면 담당 역할에게 작업을 놓고 사람의 응답을 기다립니다. 서비스 작업이면 SCADA나 CMMS 같은 시스템을 호출하고 처리 결과를 받습니다. 에이전트 단계이면 지정된 에이전트에게 맡기고 판단이 제출되기를 기다립니다. 어느 경우든 작업이 끝나야 엔진이 토큰을 다음으로 넘깁니다.</a:t>
+              <a:t>토큰이 작업에 닿으면 엔진은 그 작업의 종류에 따라 다르게 움직입니다. 사용자 작업이면 담당 역할에게 작업을 놓고 사람의 응답을 기다립니다. 서비스 작업이면 SCADA나 CMMS 같은 시스템을 호출하고 처리 결과를 받습니다. 에이전트 단계이면 지정된 에이전트에게 맡기고 추천안이 제출되기를 기다립니다. 어느 경우든 작업이 끝나야 엔진이 토큰을 다음으로 넘깁니다.</a:t>
             </a:r>
           </a:p>
         </p:txBody>
@@ -1932,7 +1932,7 @@
           <a:lstStyle/>
           <a:p>
             <a:r>
-              <a:t>운전원이 10분 동안 응답하지 않은 처리 건입니다. 승인 지연 타이머가 발생하면서 토큰이 하나 더 생겨 승인 지연 알림을 지났습니다. 처음의 토큰은 운전원 승인에 그대로 있습니다. 그래서 알림이 나간 뒤에도 처리 건은 닫히지 않고, 운전원은 여전히 승인하거나 거절할 수 있습니다.</a:t>
+              <a:t>운전원이 기한이 지나도록 응답하지 않은 처리 건입니다. 승인 지연 타이머가 발생하면서 토큰이 하나 더 생겨 승인 지연 알림을 지났습니다. 처음의 토큰은 운전원 승인에 그대로 있습니다. 그래서 알림이 나간 뒤에도 처리 건은 닫히지 않고, 운전원은 여전히 승인하거나 거절할 수 있습니다.</a:t>
             </a:r>
           </a:p>
         </p:txBody>
@@ -2072,7 +2072,7 @@
           <a:lstStyle/>
           <a:p>
             <a:r>
-              <a:t>같은 정의에서 나온 두 처리 건입니다. 왼쪽은 승인되어 설비 명령이 나갔고, 오른쪽은 거절되어 설비 명령이 없습니다. 그런데 두 건의 상태는 똑같이 COMPLETED입니다. COMPLETED는 실행이 끝났다는 뜻일 뿐이어서, 업무가 어떻게 끝났는지는 닿은 끝 이벤트와 결과 보고로 읽어야 합니다. 승인된 뒤 회복에 미달한 경우도 끝 이벤트는 같으므로 결과 보고가 정상인지 미달인지를 봅니다.</a:t>
+              <a:t>같은 정의에서 나온 두 처리 건입니다. 왼쪽은 승인되어 설비 명령이 나갔고, 오른쪽은 거절되어 설비 명령이 없으며 결과 보고의 값은 거절을 뜻하는 반려로 적혔습니다. 그런데 두 건의 상태는 똑같이 COMPLETED입니다. COMPLETED는 실행이 끝났다는 뜻일 뿐이어서, 업무가 어떻게 끝났는지는 닿은 끝 이벤트와 결과 보고로 읽어야 합니다. 승인된 뒤 회복에 미달한 경우도 끝 이벤트는 같으므로 결과 보고가 정상인지 미달인지를 봅니다.</a:t>
             </a:r>
           </a:p>
         </p:txBody>
@@ -5704,7 +5704,7 @@
       </p:sp>
       <p:pic>
         <p:nvPicPr>
-          <p:cNvPr id="6" name="삽화:흐름_토큰_둘.svg" descr="illust_3897538782687642313_1791735769.png"/>
+          <p:cNvPr id="6" name="삽화:흐름_토큰_둘.svg" descr="illust_6701027493006326460_1791735769.png"/>
           <p:cNvPicPr>
             <a:picLocks noChangeAspect="1"/>
           </p:cNvPicPr>
@@ -7698,7 +7698,7 @@
                 <a:ea typeface="맑은 고딕"/>
                 <a:cs typeface="맑은 고딕"/>
               </a:rPr>
-              <a:t>• 결과 보고: 거절</a:t>
+              <a:t>• 결과 보고: 거절(기록의 값은 반려)</a:t>
             </a:r>
           </a:p>
           <a:p>
@@ -9614,8 +9614,8 @@
         </p:nvSpPr>
         <p:spPr>
           <a:xfrm>
-            <a:off x="548640" y="2328291"/>
-            <a:ext cx="6766560" cy="3326129"/>
+            <a:off x="548640" y="1773936"/>
+            <a:ext cx="6766560" cy="4434840"/>
           </a:xfrm>
           <a:prstGeom prst="roundRect">
             <a:avLst>
@@ -9645,8 +9645,8 @@
         </p:nvSpPr>
         <p:spPr>
           <a:xfrm>
-            <a:off x="731520" y="2465451"/>
-            <a:ext cx="6400800" cy="3051810"/>
+            <a:off x="731520" y="1911096"/>
+            <a:ext cx="6400800" cy="4160520"/>
           </a:xfrm>
           <a:prstGeom prst="rect">
             <a:avLst/>
@@ -9858,7 +9858,7 @@
         </p:nvSpPr>
         <p:spPr>
           <a:xfrm>
-            <a:off x="7635240" y="2328291"/>
+            <a:off x="7635240" y="1773936"/>
             <a:ext cx="4007815" cy="1108710"/>
           </a:xfrm>
           <a:prstGeom prst="rect">
@@ -9942,7 +9942,7 @@
         </p:nvSpPr>
         <p:spPr>
           <a:xfrm>
-            <a:off x="7635240" y="3437001"/>
+            <a:off x="7635240" y="2882646"/>
             <a:ext cx="4007815" cy="1108710"/>
           </a:xfrm>
           <a:prstGeom prst="rect">
@@ -10026,7 +10026,7 @@
         </p:nvSpPr>
         <p:spPr>
           <a:xfrm>
-            <a:off x="7635240" y="4545711"/>
+            <a:off x="7635240" y="3991356"/>
             <a:ext cx="4007815" cy="1108710"/>
           </a:xfrm>
           <a:prstGeom prst="rect">
@@ -10098,6 +10098,90 @@
                 <a:cs typeface="맑은 고딕"/>
               </a:rPr>
               <a:t>실행이 끝났다.</a:t>
+            </a:r>
+          </a:p>
+        </p:txBody>
+      </p:sp>
+      <p:sp>
+        <p:nvSpPr>
+          <p:cNvPr id="11" name="TextBox 10"/>
+          <p:cNvSpPr txBox="1"/>
+          <p:nvPr/>
+        </p:nvSpPr>
+        <p:spPr>
+          <a:xfrm>
+            <a:off x="7635240" y="5100066"/>
+            <a:ext cx="4007815" cy="1108710"/>
+          </a:xfrm>
+          <a:prstGeom prst="rect">
+            <a:avLst/>
+          </a:prstGeom>
+          <a:noFill/>
+        </p:spPr>
+        <p:txBody>
+          <a:bodyPr wrap="square" anchor="ctr"/>
+          <a:lstStyle/>
+          <a:p>
+            <a:pPr algn="l">
+              <a:lnSpc>
+                <a:spcPct val="110000"/>
+              </a:lnSpc>
+              <a:spcAft>
+                <a:spcPts val="400"/>
+              </a:spcAft>
+            </a:pPr>
+            <a:r>
+              <a:rPr sz="1700" b="1">
+                <a:solidFill>
+                  <a:srgbClr val="13294B"/>
+                </a:solidFill>
+                <a:latin typeface="맑은 고딕"/>
+                <a:ea typeface="맑은 고딕"/>
+                <a:cs typeface="맑은 고딕"/>
+              </a:rPr>
+              <a:t>이 처리 건</a:t>
+            </a:r>
+          </a:p>
+          <a:p>
+            <a:pPr algn="l">
+              <a:lnSpc>
+                <a:spcPct val="110000"/>
+              </a:lnSpc>
+              <a:spcAft>
+                <a:spcPts val="400"/>
+              </a:spcAft>
+            </a:pPr>
+            <a:r>
+              <a:rPr sz="1400" b="0">
+                <a:solidFill>
+                  <a:srgbClr val="1F2A3A"/>
+                </a:solidFill>
+                <a:latin typeface="맑은 고딕"/>
+                <a:ea typeface="맑은 고딕"/>
+                <a:cs typeface="맑은 고딕"/>
+              </a:rPr>
+              <a:t>긴급 대응 프로세스가 처리한</a:t>
+            </a:r>
+          </a:p>
+          <a:p>
+            <a:pPr algn="l">
+              <a:lnSpc>
+                <a:spcPct val="110000"/>
+              </a:lnSpc>
+              <a:spcAft>
+                <a:spcPts val="400"/>
+              </a:spcAft>
+            </a:pPr>
+            <a:r>
+              <a:rPr sz="1400" b="0">
+                <a:solidFill>
+                  <a:srgbClr val="1F2A3A"/>
+                </a:solidFill>
+                <a:latin typeface="맑은 고딕"/>
+                <a:ea typeface="맑은 고딕"/>
+                <a:cs typeface="맑은 고딕"/>
+              </a:rPr>
+              <a:t>같은 종류의 경보 한 건이다.</a:t>
             </a:r>
           </a:p>
         </p:txBody>
@@ -11197,7 +11281,7 @@
                 <a:ea typeface="맑은 고딕"/>
                 <a:cs typeface="맑은 고딕"/>
               </a:rPr>
-              <a:t>감사 기록은 누가 무엇을 결정했는지를 나중에 확인하려고 남기는 기록이며, 처리 건의 시작과 승인과 종결이 남는다.</a:t>
+              <a:t>처리 건 안의 진행은 처리 기록에, 처리 건의 시작과 배포와 거부된 승인은 감사 기록에 남아 결정을 뒤에 확인할 수 있다.</a:t>
             </a:r>
           </a:p>
         </p:txBody>
@@ -11349,7 +11433,7 @@
         <p:spPr>
           <a:xfrm>
             <a:off x="3200400" y="1627632"/>
-            <a:ext cx="8442655" cy="347472"/>
+            <a:ext cx="6248095" cy="347472"/>
           </a:xfrm>
           <a:prstGeom prst="rect">
             <a:avLst/>
@@ -11381,14 +11465,53 @@
       </p:sp>
       <p:sp>
         <p:nvSpPr>
-          <p:cNvPr id="9" name="Rounded Rectangle 8"/>
+          <p:cNvPr id="9" name="TextBox 8"/>
+          <p:cNvSpPr txBox="1"/>
+          <p:nvPr/>
+        </p:nvSpPr>
+        <p:spPr>
+          <a:xfrm>
+            <a:off x="9448495" y="1627632"/>
+            <a:ext cx="2194560" cy="347472"/>
+          </a:xfrm>
+          <a:prstGeom prst="rect">
+            <a:avLst/>
+          </a:prstGeom>
+          <a:noFill/>
+        </p:spPr>
+        <p:txBody>
+          <a:bodyPr wrap="square" anchor="ctr"/>
+          <a:lstStyle/>
+          <a:p>
+            <a:pPr algn="l">
+              <a:lnSpc>
+                <a:spcPct val="110000"/>
+              </a:lnSpc>
+            </a:pPr>
+            <a:r>
+              <a:rPr sz="1300" b="1">
+                <a:solidFill>
+                  <a:srgbClr val="FFFFFF"/>
+                </a:solidFill>
+                <a:latin typeface="맑은 고딕"/>
+                <a:ea typeface="맑은 고딕"/>
+                <a:cs typeface="맑은 고딕"/>
+              </a:rPr>
+              <a:t>구분</a:t>
+            </a:r>
+          </a:p>
+        </p:txBody>
+      </p:sp>
+      <p:sp>
+        <p:nvSpPr>
+          <p:cNvPr id="10" name="Rounded Rectangle 9"/>
           <p:cNvSpPr/>
           <p:nvPr/>
         </p:nvSpPr>
         <p:spPr>
           <a:xfrm>
             <a:off x="548640" y="2061972"/>
-            <a:ext cx="11094415" cy="801014"/>
+            <a:ext cx="11094415" cy="656843"/>
           </a:xfrm>
           <a:prstGeom prst="roundRect">
             <a:avLst>
@@ -11412,14 +11535,14 @@
       </p:sp>
       <p:sp>
         <p:nvSpPr>
-          <p:cNvPr id="10" name="TextBox 9"/>
+          <p:cNvPr id="11" name="TextBox 10"/>
           <p:cNvSpPr txBox="1"/>
           <p:nvPr/>
         </p:nvSpPr>
         <p:spPr>
           <a:xfrm>
             <a:off x="685800" y="2029968"/>
-            <a:ext cx="2514600" cy="865022"/>
+            <a:ext cx="2514600" cy="720851"/>
           </a:xfrm>
           <a:prstGeom prst="rect">
             <a:avLst/>
@@ -11444,21 +11567,21 @@
                 <a:ea typeface="맑은 고딕"/>
                 <a:cs typeface="맑은 고딕"/>
               </a:rPr>
-              <a:t>INSTANCE_STARTED</a:t>
-            </a:r>
-          </a:p>
-        </p:txBody>
-      </p:sp>
-      <p:sp>
-        <p:nvSpPr>
-          <p:cNvPr id="11" name="TextBox 10"/>
+              <a:t>APPROVAL_ACCEPTED</a:t>
+            </a:r>
+          </a:p>
+        </p:txBody>
+      </p:sp>
+      <p:sp>
+        <p:nvSpPr>
+          <p:cNvPr id="12" name="TextBox 11"/>
           <p:cNvSpPr txBox="1"/>
           <p:nvPr/>
         </p:nvSpPr>
         <p:spPr>
           <a:xfrm>
             <a:off x="3200400" y="2029968"/>
-            <a:ext cx="8351215" cy="865022"/>
+            <a:ext cx="6156655" cy="720851"/>
           </a:xfrm>
           <a:prstGeom prst="rect">
             <a:avLst/>
@@ -11483,21 +11606,60 @@
                 <a:ea typeface="맑은 고딕"/>
                 <a:cs typeface="맑은 고딕"/>
               </a:rPr>
-              <a:t>처리 건이 열릴 때</a:t>
-            </a:r>
-          </a:p>
-        </p:txBody>
-      </p:sp>
-      <p:sp>
-        <p:nvSpPr>
-          <p:cNvPr id="12" name="Rounded Rectangle 11"/>
+              <a:t>승인이 접수될 때. 승인한 역할과 판단 id가 담긴다</a:t>
+            </a:r>
+          </a:p>
+        </p:txBody>
+      </p:sp>
+      <p:sp>
+        <p:nvSpPr>
+          <p:cNvPr id="13" name="TextBox 12"/>
+          <p:cNvSpPr txBox="1"/>
+          <p:nvPr/>
+        </p:nvSpPr>
+        <p:spPr>
+          <a:xfrm>
+            <a:off x="9448495" y="2029968"/>
+            <a:ext cx="2103120" cy="720851"/>
+          </a:xfrm>
+          <a:prstGeom prst="rect">
+            <a:avLst/>
+          </a:prstGeom>
+          <a:noFill/>
+        </p:spPr>
+        <p:txBody>
+          <a:bodyPr wrap="square" anchor="ctr"/>
+          <a:lstStyle/>
+          <a:p>
+            <a:pPr algn="l">
+              <a:lnSpc>
+                <a:spcPct val="110000"/>
+              </a:lnSpc>
+            </a:pPr>
+            <a:r>
+              <a:rPr sz="1250" b="1">
+                <a:solidFill>
+                  <a:srgbClr val="556175"/>
+                </a:solidFill>
+                <a:latin typeface="맑은 고딕"/>
+                <a:ea typeface="맑은 고딕"/>
+                <a:cs typeface="맑은 고딕"/>
+              </a:rPr>
+              <a:t>처리 기록</a:t>
+            </a:r>
+          </a:p>
+        </p:txBody>
+      </p:sp>
+      <p:sp>
+        <p:nvSpPr>
+          <p:cNvPr id="14" name="Rounded Rectangle 13"/>
           <p:cNvSpPr/>
           <p:nvPr/>
         </p:nvSpPr>
         <p:spPr>
           <a:xfrm>
-            <a:off x="548640" y="2926994"/>
-            <a:ext cx="11094415" cy="801014"/>
+            <a:off x="548640" y="2782824"/>
+            <a:ext cx="11094415" cy="656843"/>
           </a:xfrm>
           <a:prstGeom prst="roundRect">
             <a:avLst>
@@ -11521,14 +11683,14 @@
       </p:sp>
       <p:sp>
         <p:nvSpPr>
-          <p:cNvPr id="13" name="TextBox 12"/>
-          <p:cNvSpPr txBox="1"/>
-          <p:nvPr/>
-        </p:nvSpPr>
-        <p:spPr>
-          <a:xfrm>
-            <a:off x="685800" y="2894990"/>
-            <a:ext cx="2514600" cy="865022"/>
+          <p:cNvPr id="15" name="TextBox 14"/>
+          <p:cNvSpPr txBox="1"/>
+          <p:nvPr/>
+        </p:nvSpPr>
+        <p:spPr>
+          <a:xfrm>
+            <a:off x="685800" y="2750820"/>
+            <a:ext cx="2514600" cy="720851"/>
           </a:xfrm>
           <a:prstGeom prst="rect">
             <a:avLst/>
@@ -11553,21 +11715,21 @@
                 <a:ea typeface="맑은 고딕"/>
                 <a:cs typeface="맑은 고딕"/>
               </a:rPr>
-              <a:t>APPROVAL_ACCEPTED</a:t>
-            </a:r>
-          </a:p>
-        </p:txBody>
-      </p:sp>
-      <p:sp>
-        <p:nvSpPr>
-          <p:cNvPr id="14" name="TextBox 13"/>
-          <p:cNvSpPr txBox="1"/>
-          <p:nvPr/>
-        </p:nvSpPr>
-        <p:spPr>
-          <a:xfrm>
-            <a:off x="3200400" y="2894990"/>
-            <a:ext cx="8351215" cy="865022"/>
+              <a:t>APPROVAL_DELIVERY</a:t>
+            </a:r>
+          </a:p>
+        </p:txBody>
+      </p:sp>
+      <p:sp>
+        <p:nvSpPr>
+          <p:cNvPr id="16" name="TextBox 15"/>
+          <p:cNvSpPr txBox="1"/>
+          <p:nvPr/>
+        </p:nvSpPr>
+        <p:spPr>
+          <a:xfrm>
+            <a:off x="3200400" y="2750820"/>
+            <a:ext cx="6156655" cy="720851"/>
           </a:xfrm>
           <a:prstGeom prst="rect">
             <a:avLst/>
@@ -11592,21 +11754,60 @@
                 <a:ea typeface="맑은 고딕"/>
                 <a:cs typeface="맑은 고딕"/>
               </a:rPr>
-              <a:t>승인이 접수될 때. 승인한 역할과 판단 id가 담긴다</a:t>
-            </a:r>
-          </a:p>
-        </p:txBody>
-      </p:sp>
-      <p:sp>
-        <p:nvSpPr>
-          <p:cNvPr id="15" name="Rounded Rectangle 14"/>
+              <a:t>승인이 다음 단계로 전달될 때</a:t>
+            </a:r>
+          </a:p>
+        </p:txBody>
+      </p:sp>
+      <p:sp>
+        <p:nvSpPr>
+          <p:cNvPr id="17" name="TextBox 16"/>
+          <p:cNvSpPr txBox="1"/>
+          <p:nvPr/>
+        </p:nvSpPr>
+        <p:spPr>
+          <a:xfrm>
+            <a:off x="9448495" y="2750820"/>
+            <a:ext cx="2103120" cy="720851"/>
+          </a:xfrm>
+          <a:prstGeom prst="rect">
+            <a:avLst/>
+          </a:prstGeom>
+          <a:noFill/>
+        </p:spPr>
+        <p:txBody>
+          <a:bodyPr wrap="square" anchor="ctr"/>
+          <a:lstStyle/>
+          <a:p>
+            <a:pPr algn="l">
+              <a:lnSpc>
+                <a:spcPct val="110000"/>
+              </a:lnSpc>
+            </a:pPr>
+            <a:r>
+              <a:rPr sz="1250" b="1">
+                <a:solidFill>
+                  <a:srgbClr val="556175"/>
+                </a:solidFill>
+                <a:latin typeface="맑은 고딕"/>
+                <a:ea typeface="맑은 고딕"/>
+                <a:cs typeface="맑은 고딕"/>
+              </a:rPr>
+              <a:t>처리 기록</a:t>
+            </a:r>
+          </a:p>
+        </p:txBody>
+      </p:sp>
+      <p:sp>
+        <p:nvSpPr>
+          <p:cNvPr id="18" name="Rounded Rectangle 17"/>
           <p:cNvSpPr/>
           <p:nvPr/>
         </p:nvSpPr>
         <p:spPr>
           <a:xfrm>
-            <a:off x="548640" y="3792016"/>
-            <a:ext cx="11094415" cy="801014"/>
+            <a:off x="548640" y="3503676"/>
+            <a:ext cx="11094415" cy="656843"/>
           </a:xfrm>
           <a:prstGeom prst="roundRect">
             <a:avLst>
@@ -11630,14 +11831,14 @@
       </p:sp>
       <p:sp>
         <p:nvSpPr>
-          <p:cNvPr id="16" name="TextBox 15"/>
-          <p:cNvSpPr txBox="1"/>
-          <p:nvPr/>
-        </p:nvSpPr>
-        <p:spPr>
-          <a:xfrm>
-            <a:off x="685800" y="3760012"/>
-            <a:ext cx="2514600" cy="865022"/>
+          <p:cNvPr id="19" name="TextBox 18"/>
+          <p:cNvSpPr txBox="1"/>
+          <p:nvPr/>
+        </p:nvSpPr>
+        <p:spPr>
+          <a:xfrm>
+            <a:off x="685800" y="3471672"/>
+            <a:ext cx="2514600" cy="720851"/>
           </a:xfrm>
           <a:prstGeom prst="rect">
             <a:avLst/>
@@ -11662,21 +11863,21 @@
                 <a:ea typeface="맑은 고딕"/>
                 <a:cs typeface="맑은 고딕"/>
               </a:rPr>
-              <a:t>APPROVAL_DELIVERY</a:t>
-            </a:r>
-          </a:p>
-        </p:txBody>
-      </p:sp>
-      <p:sp>
-        <p:nvSpPr>
-          <p:cNvPr id="17" name="TextBox 16"/>
-          <p:cNvSpPr txBox="1"/>
-          <p:nvPr/>
-        </p:nvSpPr>
-        <p:spPr>
-          <a:xfrm>
-            <a:off x="3200400" y="3760012"/>
-            <a:ext cx="8351215" cy="865022"/>
+              <a:t>RESULT_REPORT</a:t>
+            </a:r>
+          </a:p>
+        </p:txBody>
+      </p:sp>
+      <p:sp>
+        <p:nvSpPr>
+          <p:cNvPr id="20" name="TextBox 19"/>
+          <p:cNvSpPr txBox="1"/>
+          <p:nvPr/>
+        </p:nvSpPr>
+        <p:spPr>
+          <a:xfrm>
+            <a:off x="3200400" y="3471672"/>
+            <a:ext cx="6156655" cy="720851"/>
           </a:xfrm>
           <a:prstGeom prst="rect">
             <a:avLst/>
@@ -11701,21 +11902,60 @@
                 <a:ea typeface="맑은 고딕"/>
                 <a:cs typeface="맑은 고딕"/>
               </a:rPr>
-              <a:t>승인이 다음 단계로 전달될 때</a:t>
-            </a:r>
-          </a:p>
-        </p:txBody>
-      </p:sp>
-      <p:sp>
-        <p:nvSpPr>
-          <p:cNvPr id="18" name="Rounded Rectangle 17"/>
+              <a:t>결과 보고가 나갈 때. 보고의 본문이 담긴다</a:t>
+            </a:r>
+          </a:p>
+        </p:txBody>
+      </p:sp>
+      <p:sp>
+        <p:nvSpPr>
+          <p:cNvPr id="21" name="TextBox 20"/>
+          <p:cNvSpPr txBox="1"/>
+          <p:nvPr/>
+        </p:nvSpPr>
+        <p:spPr>
+          <a:xfrm>
+            <a:off x="9448495" y="3471672"/>
+            <a:ext cx="2103120" cy="720851"/>
+          </a:xfrm>
+          <a:prstGeom prst="rect">
+            <a:avLst/>
+          </a:prstGeom>
+          <a:noFill/>
+        </p:spPr>
+        <p:txBody>
+          <a:bodyPr wrap="square" anchor="ctr"/>
+          <a:lstStyle/>
+          <a:p>
+            <a:pPr algn="l">
+              <a:lnSpc>
+                <a:spcPct val="110000"/>
+              </a:lnSpc>
+            </a:pPr>
+            <a:r>
+              <a:rPr sz="1250" b="1">
+                <a:solidFill>
+                  <a:srgbClr val="556175"/>
+                </a:solidFill>
+                <a:latin typeface="맑은 고딕"/>
+                <a:ea typeface="맑은 고딕"/>
+                <a:cs typeface="맑은 고딕"/>
+              </a:rPr>
+              <a:t>처리 기록</a:t>
+            </a:r>
+          </a:p>
+        </p:txBody>
+      </p:sp>
+      <p:sp>
+        <p:nvSpPr>
+          <p:cNvPr id="22" name="Rounded Rectangle 21"/>
           <p:cNvSpPr/>
           <p:nvPr/>
         </p:nvSpPr>
         <p:spPr>
           <a:xfrm>
-            <a:off x="548640" y="4657039"/>
-            <a:ext cx="11094415" cy="801014"/>
+            <a:off x="548640" y="4224528"/>
+            <a:ext cx="11094415" cy="656843"/>
           </a:xfrm>
           <a:prstGeom prst="roundRect">
             <a:avLst>
@@ -11739,14 +11979,14 @@
       </p:sp>
       <p:sp>
         <p:nvSpPr>
-          <p:cNvPr id="19" name="TextBox 18"/>
-          <p:cNvSpPr txBox="1"/>
-          <p:nvPr/>
-        </p:nvSpPr>
-        <p:spPr>
-          <a:xfrm>
-            <a:off x="685800" y="4625035"/>
-            <a:ext cx="2514600" cy="865022"/>
+          <p:cNvPr id="23" name="TextBox 22"/>
+          <p:cNvSpPr txBox="1"/>
+          <p:nvPr/>
+        </p:nvSpPr>
+        <p:spPr>
+          <a:xfrm>
+            <a:off x="685800" y="4192524"/>
+            <a:ext cx="2514600" cy="720851"/>
           </a:xfrm>
           <a:prstGeom prst="rect">
             <a:avLst/>
@@ -11771,21 +12011,21 @@
                 <a:ea typeface="맑은 고딕"/>
                 <a:cs typeface="맑은 고딕"/>
               </a:rPr>
-              <a:t>RESULT_REPORT</a:t>
-            </a:r>
-          </a:p>
-        </p:txBody>
-      </p:sp>
-      <p:sp>
-        <p:nvSpPr>
-          <p:cNvPr id="20" name="TextBox 19"/>
-          <p:cNvSpPr txBox="1"/>
-          <p:nvPr/>
-        </p:nvSpPr>
-        <p:spPr>
-          <a:xfrm>
-            <a:off x="3200400" y="4625035"/>
-            <a:ext cx="8351215" cy="865022"/>
+              <a:t>INSTANCE_STARTED</a:t>
+            </a:r>
+          </a:p>
+        </p:txBody>
+      </p:sp>
+      <p:sp>
+        <p:nvSpPr>
+          <p:cNvPr id="24" name="TextBox 23"/>
+          <p:cNvSpPr txBox="1"/>
+          <p:nvPr/>
+        </p:nvSpPr>
+        <p:spPr>
+          <a:xfrm>
+            <a:off x="3200400" y="4192524"/>
+            <a:ext cx="6156655" cy="720851"/>
           </a:xfrm>
           <a:prstGeom prst="rect">
             <a:avLst/>
@@ -11810,21 +12050,208 @@
                 <a:ea typeface="맑은 고딕"/>
                 <a:cs typeface="맑은 고딕"/>
               </a:rPr>
-              <a:t>결과 보고가 나갈 때. 보고의 본문이 담긴다</a:t>
-            </a:r>
-          </a:p>
-        </p:txBody>
-      </p:sp>
-      <p:sp>
-        <p:nvSpPr>
-          <p:cNvPr id="21" name="Rounded Rectangle 20"/>
+              <a:t>처리 건이 열릴 때</a:t>
+            </a:r>
+          </a:p>
+        </p:txBody>
+      </p:sp>
+      <p:sp>
+        <p:nvSpPr>
+          <p:cNvPr id="25" name="TextBox 24"/>
+          <p:cNvSpPr txBox="1"/>
+          <p:nvPr/>
+        </p:nvSpPr>
+        <p:spPr>
+          <a:xfrm>
+            <a:off x="9448495" y="4192524"/>
+            <a:ext cx="2103120" cy="720851"/>
+          </a:xfrm>
+          <a:prstGeom prst="rect">
+            <a:avLst/>
+          </a:prstGeom>
+          <a:noFill/>
+        </p:spPr>
+        <p:txBody>
+          <a:bodyPr wrap="square" anchor="ctr"/>
+          <a:lstStyle/>
+          <a:p>
+            <a:pPr algn="l">
+              <a:lnSpc>
+                <a:spcPct val="110000"/>
+              </a:lnSpc>
+            </a:pPr>
+            <a:r>
+              <a:rPr sz="1250" b="1">
+                <a:solidFill>
+                  <a:srgbClr val="556175"/>
+                </a:solidFill>
+                <a:latin typeface="맑은 고딕"/>
+                <a:ea typeface="맑은 고딕"/>
+                <a:cs typeface="맑은 고딕"/>
+              </a:rPr>
+              <a:t>감사 기록</a:t>
+            </a:r>
+          </a:p>
+        </p:txBody>
+      </p:sp>
+      <p:sp>
+        <p:nvSpPr>
+          <p:cNvPr id="26" name="Rounded Rectangle 25"/>
           <p:cNvSpPr/>
           <p:nvPr/>
         </p:nvSpPr>
         <p:spPr>
           <a:xfrm>
-            <a:off x="548640" y="5522061"/>
-            <a:ext cx="11094415" cy="801014"/>
+            <a:off x="548640" y="4945380"/>
+            <a:ext cx="11094415" cy="656843"/>
+          </a:xfrm>
+          <a:prstGeom prst="roundRect">
+            <a:avLst>
+              <a:gd name="adj" fmla="val 8000"/>
+            </a:avLst>
+          </a:prstGeom>
+          <a:solidFill>
+            <a:srgbClr val="F3F6F9"/>
+          </a:solidFill>
+          <a:ln>
+            <a:noFill/>
+          </a:ln>
+        </p:spPr>
+        <p:txBody>
+          <a:bodyPr rtlCol="0" anchor="ctr"/>
+          <a:lstStyle/>
+          <a:p>
+            <a:pPr algn="ctr"/>
+          </a:p>
+        </p:txBody>
+      </p:sp>
+      <p:sp>
+        <p:nvSpPr>
+          <p:cNvPr id="27" name="TextBox 26"/>
+          <p:cNvSpPr txBox="1"/>
+          <p:nvPr/>
+        </p:nvSpPr>
+        <p:spPr>
+          <a:xfrm>
+            <a:off x="685800" y="4913376"/>
+            <a:ext cx="2514600" cy="720851"/>
+          </a:xfrm>
+          <a:prstGeom prst="rect">
+            <a:avLst/>
+          </a:prstGeom>
+          <a:noFill/>
+        </p:spPr>
+        <p:txBody>
+          <a:bodyPr wrap="square" anchor="ctr"/>
+          <a:lstStyle/>
+          <a:p>
+            <a:pPr algn="l">
+              <a:lnSpc>
+                <a:spcPct val="110000"/>
+              </a:lnSpc>
+            </a:pPr>
+            <a:r>
+              <a:rPr sz="1600" b="1">
+                <a:solidFill>
+                  <a:srgbClr val="13294B"/>
+                </a:solidFill>
+                <a:latin typeface="맑은 고딕"/>
+                <a:ea typeface="맑은 고딕"/>
+                <a:cs typeface="맑은 고딕"/>
+              </a:rPr>
+              <a:t>DEFINITION_DEPLOYED</a:t>
+            </a:r>
+          </a:p>
+        </p:txBody>
+      </p:sp>
+      <p:sp>
+        <p:nvSpPr>
+          <p:cNvPr id="28" name="TextBox 27"/>
+          <p:cNvSpPr txBox="1"/>
+          <p:nvPr/>
+        </p:nvSpPr>
+        <p:spPr>
+          <a:xfrm>
+            <a:off x="3200400" y="4913376"/>
+            <a:ext cx="6156655" cy="720851"/>
+          </a:xfrm>
+          <a:prstGeom prst="rect">
+            <a:avLst/>
+          </a:prstGeom>
+          <a:noFill/>
+        </p:spPr>
+        <p:txBody>
+          <a:bodyPr wrap="square" anchor="ctr"/>
+          <a:lstStyle/>
+          <a:p>
+            <a:pPr algn="l">
+              <a:lnSpc>
+                <a:spcPct val="110000"/>
+              </a:lnSpc>
+            </a:pPr>
+            <a:r>
+              <a:rPr sz="1400" b="0">
+                <a:solidFill>
+                  <a:srgbClr val="1F2A3A"/>
+                </a:solidFill>
+                <a:latin typeface="맑은 고딕"/>
+                <a:ea typeface="맑은 고딕"/>
+                <a:cs typeface="맑은 고딕"/>
+              </a:rPr>
+              <a:t>프로세스 정의의 판본이 배포될 때</a:t>
+            </a:r>
+          </a:p>
+        </p:txBody>
+      </p:sp>
+      <p:sp>
+        <p:nvSpPr>
+          <p:cNvPr id="29" name="TextBox 28"/>
+          <p:cNvSpPr txBox="1"/>
+          <p:nvPr/>
+        </p:nvSpPr>
+        <p:spPr>
+          <a:xfrm>
+            <a:off x="9448495" y="4913376"/>
+            <a:ext cx="2103120" cy="720851"/>
+          </a:xfrm>
+          <a:prstGeom prst="rect">
+            <a:avLst/>
+          </a:prstGeom>
+          <a:noFill/>
+        </p:spPr>
+        <p:txBody>
+          <a:bodyPr wrap="square" anchor="ctr"/>
+          <a:lstStyle/>
+          <a:p>
+            <a:pPr algn="l">
+              <a:lnSpc>
+                <a:spcPct val="110000"/>
+              </a:lnSpc>
+            </a:pPr>
+            <a:r>
+              <a:rPr sz="1250" b="1">
+                <a:solidFill>
+                  <a:srgbClr val="556175"/>
+                </a:solidFill>
+                <a:latin typeface="맑은 고딕"/>
+                <a:ea typeface="맑은 고딕"/>
+                <a:cs typeface="맑은 고딕"/>
+              </a:rPr>
+              <a:t>감사 기록</a:t>
+            </a:r>
+          </a:p>
+        </p:txBody>
+      </p:sp>
+      <p:sp>
+        <p:nvSpPr>
+          <p:cNvPr id="30" name="Rounded Rectangle 29"/>
+          <p:cNvSpPr/>
+          <p:nvPr/>
+        </p:nvSpPr>
+        <p:spPr>
+          <a:xfrm>
+            <a:off x="548640" y="5666232"/>
+            <a:ext cx="11094415" cy="656843"/>
           </a:xfrm>
           <a:prstGeom prst="roundRect">
             <a:avLst>
@@ -11848,14 +12275,14 @@
       </p:sp>
       <p:sp>
         <p:nvSpPr>
-          <p:cNvPr id="22" name="TextBox 21"/>
-          <p:cNvSpPr txBox="1"/>
-          <p:nvPr/>
-        </p:nvSpPr>
-        <p:spPr>
-          <a:xfrm>
-            <a:off x="685800" y="5490057"/>
-            <a:ext cx="2514600" cy="865022"/>
+          <p:cNvPr id="31" name="TextBox 30"/>
+          <p:cNvSpPr txBox="1"/>
+          <p:nvPr/>
+        </p:nvSpPr>
+        <p:spPr>
+          <a:xfrm>
+            <a:off x="685800" y="5634228"/>
+            <a:ext cx="2514600" cy="720851"/>
           </a:xfrm>
           <a:prstGeom prst="rect">
             <a:avLst/>
@@ -11887,14 +12314,14 @@
       </p:sp>
       <p:sp>
         <p:nvSpPr>
-          <p:cNvPr id="23" name="TextBox 22"/>
-          <p:cNvSpPr txBox="1"/>
-          <p:nvPr/>
-        </p:nvSpPr>
-        <p:spPr>
-          <a:xfrm>
-            <a:off x="3200400" y="5490057"/>
-            <a:ext cx="8351215" cy="865022"/>
+          <p:cNvPr id="32" name="TextBox 31"/>
+          <p:cNvSpPr txBox="1"/>
+          <p:nvPr/>
+        </p:nvSpPr>
+        <p:spPr>
+          <a:xfrm>
+            <a:off x="3200400" y="5634228"/>
+            <a:ext cx="6156655" cy="720851"/>
           </a:xfrm>
           <a:prstGeom prst="rect">
             <a:avLst/>
@@ -11920,6 +12347,45 @@
                 <a:cs typeface="맑은 고딕"/>
               </a:rPr>
               <a:t>승인 역할이 아닌 쪽이 승인을 시도해 거부될 때</a:t>
+            </a:r>
+          </a:p>
+        </p:txBody>
+      </p:sp>
+      <p:sp>
+        <p:nvSpPr>
+          <p:cNvPr id="33" name="TextBox 32"/>
+          <p:cNvSpPr txBox="1"/>
+          <p:nvPr/>
+        </p:nvSpPr>
+        <p:spPr>
+          <a:xfrm>
+            <a:off x="9448495" y="5634228"/>
+            <a:ext cx="2103120" cy="720851"/>
+          </a:xfrm>
+          <a:prstGeom prst="rect">
+            <a:avLst/>
+          </a:prstGeom>
+          <a:noFill/>
+        </p:spPr>
+        <p:txBody>
+          <a:bodyPr wrap="square" anchor="ctr"/>
+          <a:lstStyle/>
+          <a:p>
+            <a:pPr algn="l">
+              <a:lnSpc>
+                <a:spcPct val="110000"/>
+              </a:lnSpc>
+            </a:pPr>
+            <a:r>
+              <a:rPr sz="1250" b="1">
+                <a:solidFill>
+                  <a:srgbClr val="1A6FC4"/>
+                </a:solidFill>
+                <a:latin typeface="맑은 고딕"/>
+                <a:ea typeface="맑은 고딕"/>
+                <a:cs typeface="맑은 고딕"/>
+              </a:rPr>
+              <a:t>감사 기록</a:t>
             </a:r>
           </a:p>
         </p:txBody>
@@ -12265,7 +12731,7 @@
                 <a:ea typeface="맑은 고딕"/>
                 <a:cs typeface="맑은 고딕"/>
               </a:rPr>
-              <a:t>이 실습을 마치면 직접 배포한 프로세스로 열린 처리 건 한 건과 그 처리 기록이 남는다.</a:t>
+              <a:t>배포한 프로세스를 쿨러 열화로 실행하면 처리 건 한 건이 열리고, 그 처리 기록에서 대기와 완료를 구분해 읽는다.</a:t>
             </a:r>
           </a:p>
         </p:txBody>
@@ -12701,7 +13167,7 @@
                 <a:ea typeface="맑은 고딕"/>
                 <a:cs typeface="맑은 고딕"/>
               </a:rPr>
-              <a:t>에이전트의 판단 뒤 운전원 승인에서 기다리는 상태를 읽는다</a:t>
+              <a:t>에이전트의 추천안이 나온 뒤 운전원 승인에서 기다리는 상태를 읽는다</a:t>
             </a:r>
           </a:p>
         </p:txBody>
@@ -16784,8 +17250,8 @@
         </p:nvSpPr>
         <p:spPr>
           <a:xfrm>
-            <a:off x="548640" y="2511552"/>
-            <a:ext cx="3515258" cy="2959607"/>
+            <a:off x="548640" y="2383726"/>
+            <a:ext cx="2567863" cy="3215258"/>
           </a:xfrm>
           <a:prstGeom prst="roundRect">
             <a:avLst>
@@ -16817,7 +17283,7 @@
         </p:nvSpPr>
         <p:spPr>
           <a:xfrm>
-            <a:off x="777240" y="2712720"/>
+            <a:off x="777240" y="2584894"/>
             <a:ext cx="731520" cy="731520"/>
           </a:xfrm>
           <a:prstGeom prst="ellipse">
@@ -16854,7 +17320,7 @@
         </p:blipFill>
         <p:spPr>
           <a:xfrm>
-            <a:off x="930859" y="2866339"/>
+            <a:off x="930859" y="2738513"/>
             <a:ext cx="424281" cy="424281"/>
           </a:xfrm>
           <a:prstGeom prst="rect">
@@ -16870,8 +17336,8 @@
         </p:nvSpPr>
         <p:spPr>
           <a:xfrm>
-            <a:off x="713232" y="3535680"/>
-            <a:ext cx="3186074" cy="1432559"/>
+            <a:off x="713232" y="3407854"/>
+            <a:ext cx="2238679" cy="1688210"/>
           </a:xfrm>
           <a:prstGeom prst="rect">
             <a:avLst/>
@@ -16912,7 +17378,7 @@
               </a:spcAft>
             </a:pPr>
             <a:r>
-              <a:rPr sz="1400" b="0">
+              <a:rPr sz="1350" b="0">
                 <a:solidFill>
                   <a:srgbClr val="1F2A3A"/>
                 </a:solidFill>
@@ -16933,7 +17399,7 @@
         </p:nvSpPr>
         <p:spPr>
           <a:xfrm>
-            <a:off x="777240" y="5041392"/>
+            <a:off x="777240" y="5169217"/>
             <a:ext cx="868680" cy="292608"/>
           </a:xfrm>
           <a:prstGeom prst="roundRect">
@@ -16964,7 +17430,7 @@
         </p:nvSpPr>
         <p:spPr>
           <a:xfrm>
-            <a:off x="777240" y="5041392"/>
+            <a:off x="777240" y="5169217"/>
             <a:ext cx="868680" cy="292608"/>
           </a:xfrm>
           <a:prstGeom prst="rect">
@@ -17003,8 +17469,8 @@
         </p:nvSpPr>
         <p:spPr>
           <a:xfrm>
-            <a:off x="4338218" y="2511552"/>
-            <a:ext cx="3515258" cy="2959607"/>
+            <a:off x="3390823" y="2383726"/>
+            <a:ext cx="2567863" cy="3215258"/>
           </a:xfrm>
           <a:prstGeom prst="roundRect">
             <a:avLst>
@@ -17036,7 +17502,7 @@
         </p:nvSpPr>
         <p:spPr>
           <a:xfrm>
-            <a:off x="4566818" y="2712720"/>
+            <a:off x="3619423" y="2584894"/>
             <a:ext cx="731520" cy="731520"/>
           </a:xfrm>
           <a:prstGeom prst="ellipse">
@@ -17073,7 +17539,7 @@
         </p:blipFill>
         <p:spPr>
           <a:xfrm>
-            <a:off x="4720437" y="2866339"/>
+            <a:off x="3773043" y="2738513"/>
             <a:ext cx="424281" cy="424281"/>
           </a:xfrm>
           <a:prstGeom prst="rect">
@@ -17089,8 +17555,8 @@
         </p:nvSpPr>
         <p:spPr>
           <a:xfrm>
-            <a:off x="4502810" y="3535680"/>
-            <a:ext cx="3186074" cy="1432559"/>
+            <a:off x="3555415" y="3407854"/>
+            <a:ext cx="2238679" cy="1688210"/>
           </a:xfrm>
           <a:prstGeom prst="rect">
             <a:avLst/>
@@ -17131,7 +17597,7 @@
               </a:spcAft>
             </a:pPr>
             <a:r>
-              <a:rPr sz="1400" b="0">
+              <a:rPr sz="1350" b="0">
                 <a:solidFill>
                   <a:srgbClr val="1F2A3A"/>
                 </a:solidFill>
@@ -17152,7 +17618,7 @@
         </p:nvSpPr>
         <p:spPr>
           <a:xfrm>
-            <a:off x="4566818" y="5041392"/>
+            <a:off x="3619423" y="5169217"/>
             <a:ext cx="868680" cy="292608"/>
           </a:xfrm>
           <a:prstGeom prst="roundRect">
@@ -17183,7 +17649,7 @@
         </p:nvSpPr>
         <p:spPr>
           <a:xfrm>
-            <a:off x="4566818" y="5041392"/>
+            <a:off x="3619423" y="5169217"/>
             <a:ext cx="868680" cy="292608"/>
           </a:xfrm>
           <a:prstGeom prst="rect">
@@ -17222,8 +17688,8 @@
         </p:nvSpPr>
         <p:spPr>
           <a:xfrm>
-            <a:off x="8127796" y="2511552"/>
-            <a:ext cx="3515258" cy="2959607"/>
+            <a:off x="6233007" y="2383726"/>
+            <a:ext cx="2567863" cy="3215258"/>
           </a:xfrm>
           <a:prstGeom prst="roundRect">
             <a:avLst>
@@ -17255,7 +17721,7 @@
         </p:nvSpPr>
         <p:spPr>
           <a:xfrm>
-            <a:off x="8356396" y="2712720"/>
+            <a:off x="6461607" y="2584894"/>
             <a:ext cx="731520" cy="731520"/>
           </a:xfrm>
           <a:prstGeom prst="ellipse">
@@ -17292,7 +17758,7 @@
         </p:blipFill>
         <p:spPr>
           <a:xfrm>
-            <a:off x="8510016" y="2866339"/>
+            <a:off x="6615226" y="2738513"/>
             <a:ext cx="424281" cy="424281"/>
           </a:xfrm>
           <a:prstGeom prst="rect">
@@ -17308,8 +17774,8 @@
         </p:nvSpPr>
         <p:spPr>
           <a:xfrm>
-            <a:off x="8292388" y="3535680"/>
-            <a:ext cx="3186074" cy="1432559"/>
+            <a:off x="6397599" y="3407854"/>
+            <a:ext cx="2238679" cy="1688210"/>
           </a:xfrm>
           <a:prstGeom prst="rect">
             <a:avLst/>
@@ -17350,7 +17816,7 @@
               </a:spcAft>
             </a:pPr>
             <a:r>
-              <a:rPr sz="1400" b="0">
+              <a:rPr sz="1350" b="0">
                 <a:solidFill>
                   <a:srgbClr val="1F2A3A"/>
                 </a:solidFill>
@@ -17371,7 +17837,7 @@
         </p:nvSpPr>
         <p:spPr>
           <a:xfrm>
-            <a:off x="8356396" y="5041392"/>
+            <a:off x="6461607" y="5169217"/>
             <a:ext cx="822960" cy="292608"/>
           </a:xfrm>
           <a:prstGeom prst="roundRect">
@@ -17402,7 +17868,7 @@
         </p:nvSpPr>
         <p:spPr>
           <a:xfrm>
-            <a:off x="8356396" y="5041392"/>
+            <a:off x="6461607" y="5169217"/>
             <a:ext cx="822960" cy="292608"/>
           </a:xfrm>
           <a:prstGeom prst="rect">
@@ -17429,6 +17895,225 @@
                 <a:cs typeface="맑은 고딕"/>
               </a:rPr>
               <a:t>보존</a:t>
+            </a:r>
+          </a:p>
+        </p:txBody>
+      </p:sp>
+      <p:sp>
+        <p:nvSpPr>
+          <p:cNvPr id="24" name="Rounded Rectangle 23"/>
+          <p:cNvSpPr/>
+          <p:nvPr/>
+        </p:nvSpPr>
+        <p:spPr>
+          <a:xfrm>
+            <a:off x="9075191" y="2383726"/>
+            <a:ext cx="2567863" cy="3215258"/>
+          </a:xfrm>
+          <a:prstGeom prst="roundRect">
+            <a:avLst>
+              <a:gd name="adj" fmla="val 4000"/>
+            </a:avLst>
+          </a:prstGeom>
+          <a:solidFill>
+            <a:srgbClr val="FFFFFF"/>
+          </a:solidFill>
+          <a:ln w="15875">
+            <a:solidFill>
+              <a:srgbClr val="D3D9E1"/>
+            </a:solidFill>
+          </a:ln>
+        </p:spPr>
+        <p:txBody>
+          <a:bodyPr rtlCol="0" anchor="ctr"/>
+          <a:lstStyle/>
+          <a:p>
+            <a:pPr algn="ctr"/>
+          </a:p>
+        </p:txBody>
+      </p:sp>
+      <p:sp>
+        <p:nvSpPr>
+          <p:cNvPr id="25" name="Oval 24"/>
+          <p:cNvSpPr/>
+          <p:nvPr/>
+        </p:nvSpPr>
+        <p:spPr>
+          <a:xfrm>
+            <a:off x="9303791" y="2584894"/>
+            <a:ext cx="731520" cy="731520"/>
+          </a:xfrm>
+          <a:prstGeom prst="ellipse">
+            <a:avLst/>
+          </a:prstGeom>
+          <a:solidFill>
+            <a:srgbClr val="E7F3FD"/>
+          </a:solidFill>
+          <a:ln>
+            <a:noFill/>
+          </a:ln>
+        </p:spPr>
+        <p:txBody>
+          <a:bodyPr rtlCol="0" anchor="ctr"/>
+          <a:lstStyle/>
+          <a:p>
+            <a:pPr algn="ctr"/>
+          </a:p>
+        </p:txBody>
+      </p:sp>
+      <p:pic>
+        <p:nvPicPr>
+          <p:cNvPr id="26" name="아이콘:arrow-back-up" descr="arrow-back-up_13294B_1.6.png"/>
+          <p:cNvPicPr>
+            <a:picLocks noChangeAspect="1"/>
+          </p:cNvPicPr>
+          <p:nvPr/>
+        </p:nvPicPr>
+        <p:blipFill>
+          <a:blip r:embed="rId6"/>
+          <a:stretch>
+            <a:fillRect/>
+          </a:stretch>
+        </p:blipFill>
+        <p:spPr>
+          <a:xfrm>
+            <a:off x="9457410" y="2738513"/>
+            <a:ext cx="424281" cy="424281"/>
+          </a:xfrm>
+          <a:prstGeom prst="rect">
+            <a:avLst/>
+          </a:prstGeom>
+        </p:spPr>
+      </p:pic>
+      <p:sp>
+        <p:nvSpPr>
+          <p:cNvPr id="27" name="TextBox 26"/>
+          <p:cNvSpPr txBox="1"/>
+          <p:nvPr/>
+        </p:nvSpPr>
+        <p:spPr>
+          <a:xfrm>
+            <a:off x="9239783" y="3407854"/>
+            <a:ext cx="2238679" cy="1688210"/>
+          </a:xfrm>
+          <a:prstGeom prst="rect">
+            <a:avLst/>
+          </a:prstGeom>
+          <a:noFill/>
+        </p:spPr>
+        <p:txBody>
+          <a:bodyPr wrap="square" anchor="t"/>
+          <a:lstStyle/>
+          <a:p>
+            <a:pPr algn="l">
+              <a:lnSpc>
+                <a:spcPct val="110000"/>
+              </a:lnSpc>
+              <a:spcAft>
+                <a:spcPts val="400"/>
+              </a:spcAft>
+            </a:pPr>
+            <a:r>
+              <a:rPr sz="1800" b="1">
+                <a:solidFill>
+                  <a:srgbClr val="13294B"/>
+                </a:solidFill>
+                <a:latin typeface="맑은 고딕"/>
+                <a:ea typeface="맑은 고딕"/>
+                <a:cs typeface="맑은 고딕"/>
+              </a:rPr>
+              <a:t>기준 흐름으로 되돌리기</a:t>
+            </a:r>
+          </a:p>
+          <a:p>
+            <a:pPr algn="l">
+              <a:lnSpc>
+                <a:spcPct val="110000"/>
+              </a:lnSpc>
+              <a:spcAft>
+                <a:spcPts val="400"/>
+              </a:spcAft>
+            </a:pPr>
+            <a:r>
+              <a:rPr sz="1350" b="0">
+                <a:solidFill>
+                  <a:srgbClr val="1F2A3A"/>
+                </a:solidFill>
+                <a:latin typeface="맑은 고딕"/>
+                <a:ea typeface="맑은 고딕"/>
+                <a:cs typeface="맑은 고딕"/>
+              </a:rPr>
+              <a:t>확인을 마치면 기준 흐름을 다시 배포해 경보를 받는 흐름을 되돌린다</a:t>
+            </a:r>
+          </a:p>
+        </p:txBody>
+      </p:sp>
+      <p:sp>
+        <p:nvSpPr>
+          <p:cNvPr id="28" name="Rounded Rectangle 27"/>
+          <p:cNvSpPr/>
+          <p:nvPr/>
+        </p:nvSpPr>
+        <p:spPr>
+          <a:xfrm>
+            <a:off x="9303791" y="5169217"/>
+            <a:ext cx="975360" cy="292608"/>
+          </a:xfrm>
+          <a:prstGeom prst="roundRect">
+            <a:avLst>
+              <a:gd name="adj" fmla="val 50000"/>
+            </a:avLst>
+          </a:prstGeom>
+          <a:solidFill>
+            <a:srgbClr val="D3D9E1"/>
+          </a:solidFill>
+          <a:ln>
+            <a:noFill/>
+          </a:ln>
+        </p:spPr>
+        <p:txBody>
+          <a:bodyPr rtlCol="0" anchor="ctr"/>
+          <a:lstStyle/>
+          <a:p>
+            <a:pPr algn="ctr"/>
+          </a:p>
+        </p:txBody>
+      </p:sp>
+      <p:sp>
+        <p:nvSpPr>
+          <p:cNvPr id="29" name="TextBox 28"/>
+          <p:cNvSpPr txBox="1"/>
+          <p:nvPr/>
+        </p:nvSpPr>
+        <p:spPr>
+          <a:xfrm>
+            <a:off x="9303791" y="5169217"/>
+            <a:ext cx="975360" cy="292608"/>
+          </a:xfrm>
+          <a:prstGeom prst="rect">
+            <a:avLst/>
+          </a:prstGeom>
+          <a:noFill/>
+        </p:spPr>
+        <p:txBody>
+          <a:bodyPr wrap="square" anchor="ctr"/>
+          <a:lstStyle/>
+          <a:p>
+            <a:pPr algn="ctr">
+              <a:lnSpc>
+                <a:spcPct val="110000"/>
+              </a:lnSpc>
+            </a:pPr>
+            <a:r>
+              <a:rPr sz="1200" b="1">
+                <a:solidFill>
+                  <a:srgbClr val="13294B"/>
+                </a:solidFill>
+                <a:latin typeface="맑은 고딕"/>
+                <a:ea typeface="맑은 고딕"/>
+                <a:cs typeface="맑은 고딕"/>
+              </a:rPr>
+              <a:t>되돌리기</a:t>
             </a:r>
           </a:p>
         </p:txBody>
@@ -24200,7 +24885,7 @@
                 <a:ea typeface="맑은 고딕"/>
                 <a:cs typeface="맑은 고딕"/>
               </a:rPr>
-              <a:t>• 추천만으로는 설비 명령이 만들어지지 않는다</a:t>
+              <a:t>• 추천안만으로는 설비 명령이 만들어지지 않는다</a:t>
             </a:r>
           </a:p>
         </p:txBody>
@@ -24908,7 +25593,7 @@
       </p:sp>
       <p:pic>
         <p:nvPicPr>
-          <p:cNvPr id="6" name="삽화:흐름_토큰_승인대기.svg" descr="illust_4221727986253824292_1791735769.png"/>
+          <p:cNvPr id="6" name="삽화:흐름_토큰_승인대기.svg" descr="illust_3113577012658663559_1791735769.png"/>
           <p:cNvPicPr>
             <a:picLocks noChangeAspect="1"/>
           </p:cNvPicPr>
@@ -26377,7 +27062,7 @@
                 <a:ea typeface="맑은 고딕"/>
                 <a:cs typeface="맑은 고딕"/>
               </a:rPr>
-              <a:t>• 판단이 제출되면 끝난다</a:t>
+              <a:t>• 추천안이 제출되면 끝난다</a:t>
             </a:r>
           </a:p>
         </p:txBody>

--- a/docs/교재/실전반_오프라인/08회차/실전반_오프라인_08회차.pptx
+++ b/docs/교재/실전반_오프라인/08회차/실전반_오프라인_08회차.pptx
@@ -5704,7 +5704,7 @@
       </p:sp>
       <p:pic>
         <p:nvPicPr>
-          <p:cNvPr id="6" name="삽화:흐름_토큰_둘.svg" descr="illust_6701027493006326460_1791735769.png"/>
+          <p:cNvPr id="6" name="삽화:흐름_토큰_둘.svg" descr="illust_8665054756328738036_1791735769.png"/>
           <p:cNvPicPr>
             <a:picLocks noChangeAspect="1"/>
           </p:cNvPicPr>
@@ -19197,7 +19197,7 @@
                 <a:ea typeface="맑은 고딕"/>
                 <a:cs typeface="맑은 고딕"/>
               </a:rPr>
-              <a:t>배운 내용을 바탕으로 정답을 맞춰보세요.</a:t>
+              <a:t>배운 내용을 바탕으로 정답을 맞혀 보세요.</a:t>
             </a:r>
           </a:p>
         </p:txBody>
@@ -25593,7 +25593,7 @@
       </p:sp>
       <p:pic>
         <p:nvPicPr>
-          <p:cNvPr id="6" name="삽화:흐름_토큰_승인대기.svg" descr="illust_3113577012658663559_1791735769.png"/>
+          <p:cNvPr id="6" name="삽화:흐름_토큰_승인대기.svg" descr="illust_4467378964442694356_1791735769.png"/>
           <p:cNvPicPr>
             <a:picLocks noChangeAspect="1"/>
           </p:cNvPicPr>
